--- a/docs/deliverables/marca/plantilla-presentacion-monumento.pptx
+++ b/docs/deliverables/marca/plantilla-presentacion-monumento.pptx
@@ -1577,7 +1577,7 @@
                 <a:ea typeface="Cambria" pitchFamily="34" charset="-122"/>
                 <a:cs typeface="Cambria" pitchFamily="34" charset="-120"/>
               </a:rPr>
-              <a:t>Ocho muros de piedra seca sobre la roca intermareal.</a:t>
+              <a:t>Cinco muros de piedra seca sobre la roca intermareal.</a:t>
             </a:r>
             <a:endParaRPr lang="en-US" sz="1500" dirty="0"/>
           </a:p>
